--- a/Data/PPT_Learn/PPT_File/48.pptx
+++ b/Data/PPT_Learn/PPT_File/48.pptx
@@ -158,7 +158,7 @@
           </a:lstStyle>
           <a:p>
             <a:r>
-              <a:rPr lang="en-US" smtClean="0"/>
+              <a:rPr lang="en-US"/>
               <a:t>Click to edit Master title style</a:t>
             </a:r>
             <a:endParaRPr lang="en-US" dirty="0"/>
@@ -223,7 +223,7 @@
           </a:lstStyle>
           <a:p>
             <a:r>
-              <a:rPr lang="en-US" smtClean="0"/>
+              <a:rPr lang="en-US"/>
               <a:t>Click to edit Master subtitle style</a:t>
             </a:r>
             <a:endParaRPr lang="en-US" dirty="0"/>
@@ -247,7 +247,7 @@
           <a:p>
             <a:fld id="{D9EE7AAC-8CEC-485B-AC6B-CF6CD7099F42}" type="datetimeFigureOut">
               <a:rPr lang="en-US" smtClean="0"/>
-              <a:t>29-07-2024</a:t>
+              <a:t>12/2/2025</a:t>
             </a:fld>
             <a:endParaRPr lang="en-US"/>
           </a:p>
@@ -350,7 +350,7 @@
           </a:lstStyle>
           <a:p>
             <a:r>
-              <a:rPr lang="en-US" smtClean="0"/>
+              <a:rPr lang="en-US"/>
               <a:t>Click to edit Master title style</a:t>
             </a:r>
             <a:endParaRPr lang="en-US" dirty="0"/>
@@ -415,7 +415,7 @@
           </a:lstStyle>
           <a:p>
             <a:r>
-              <a:rPr lang="en-US" smtClean="0"/>
+              <a:rPr lang="en-US"/>
               <a:t>Click icon to add picture</a:t>
             </a:r>
             <a:endParaRPr lang="en-US" dirty="0"/>
@@ -481,7 +481,7 @@
           <a:p>
             <a:pPr lvl="0"/>
             <a:r>
-              <a:rPr lang="en-US" smtClean="0"/>
+              <a:rPr lang="en-US"/>
               <a:t>Click to edit Master text styles</a:t>
             </a:r>
           </a:p>
@@ -504,7 +504,7 @@
           <a:p>
             <a:fld id="{D9EE7AAC-8CEC-485B-AC6B-CF6CD7099F42}" type="datetimeFigureOut">
               <a:rPr lang="en-US" smtClean="0"/>
-              <a:t>29-07-2024</a:t>
+              <a:t>12/2/2025</a:t>
             </a:fld>
             <a:endParaRPr lang="en-US"/>
           </a:p>
@@ -598,7 +598,7 @@
           <a:lstStyle/>
           <a:p>
             <a:r>
-              <a:rPr lang="en-US" smtClean="0"/>
+              <a:rPr lang="en-US"/>
               <a:t>Click to edit Master title style</a:t>
             </a:r>
             <a:endParaRPr lang="en-US" dirty="0"/>
@@ -622,35 +622,35 @@
           <a:p>
             <a:pPr lvl="0"/>
             <a:r>
-              <a:rPr lang="en-US" smtClean="0"/>
+              <a:rPr lang="en-US"/>
               <a:t>Click to edit Master text styles</a:t>
             </a:r>
           </a:p>
           <a:p>
             <a:pPr lvl="1"/>
             <a:r>
-              <a:rPr lang="en-US" smtClean="0"/>
+              <a:rPr lang="en-US"/>
               <a:t>Second level</a:t>
             </a:r>
           </a:p>
           <a:p>
             <a:pPr lvl="2"/>
             <a:r>
-              <a:rPr lang="en-US" smtClean="0"/>
+              <a:rPr lang="en-US"/>
               <a:t>Third level</a:t>
             </a:r>
           </a:p>
           <a:p>
             <a:pPr lvl="3"/>
             <a:r>
-              <a:rPr lang="en-US" smtClean="0"/>
+              <a:rPr lang="en-US"/>
               <a:t>Fourth level</a:t>
             </a:r>
           </a:p>
           <a:p>
             <a:pPr lvl="4"/>
             <a:r>
-              <a:rPr lang="en-US" smtClean="0"/>
+              <a:rPr lang="en-US"/>
               <a:t>Fifth level</a:t>
             </a:r>
             <a:endParaRPr lang="en-US" dirty="0"/>
@@ -674,7 +674,7 @@
           <a:p>
             <a:fld id="{D9EE7AAC-8CEC-485B-AC6B-CF6CD7099F42}" type="datetimeFigureOut">
               <a:rPr lang="en-US" smtClean="0"/>
-              <a:t>29-07-2024</a:t>
+              <a:t>12/2/2025</a:t>
             </a:fld>
             <a:endParaRPr lang="en-US"/>
           </a:p>
@@ -773,7 +773,7 @@
           <a:lstStyle/>
           <a:p>
             <a:r>
-              <a:rPr lang="en-US" smtClean="0"/>
+              <a:rPr lang="en-US"/>
               <a:t>Click to edit Master title style</a:t>
             </a:r>
             <a:endParaRPr lang="en-US" dirty="0"/>
@@ -802,35 +802,35 @@
           <a:p>
             <a:pPr lvl="0"/>
             <a:r>
-              <a:rPr lang="en-US" smtClean="0"/>
+              <a:rPr lang="en-US"/>
               <a:t>Click to edit Master text styles</a:t>
             </a:r>
           </a:p>
           <a:p>
             <a:pPr lvl="1"/>
             <a:r>
-              <a:rPr lang="en-US" smtClean="0"/>
+              <a:rPr lang="en-US"/>
               <a:t>Second level</a:t>
             </a:r>
           </a:p>
           <a:p>
             <a:pPr lvl="2"/>
             <a:r>
-              <a:rPr lang="en-US" smtClean="0"/>
+              <a:rPr lang="en-US"/>
               <a:t>Third level</a:t>
             </a:r>
           </a:p>
           <a:p>
             <a:pPr lvl="3"/>
             <a:r>
-              <a:rPr lang="en-US" smtClean="0"/>
+              <a:rPr lang="en-US"/>
               <a:t>Fourth level</a:t>
             </a:r>
           </a:p>
           <a:p>
             <a:pPr lvl="4"/>
             <a:r>
-              <a:rPr lang="en-US" smtClean="0"/>
+              <a:rPr lang="en-US"/>
               <a:t>Fifth level</a:t>
             </a:r>
             <a:endParaRPr lang="en-US" dirty="0"/>
@@ -854,7 +854,7 @@
           <a:p>
             <a:fld id="{D9EE7AAC-8CEC-485B-AC6B-CF6CD7099F42}" type="datetimeFigureOut">
               <a:rPr lang="en-US" smtClean="0"/>
-              <a:t>29-07-2024</a:t>
+              <a:t>12/2/2025</a:t>
             </a:fld>
             <a:endParaRPr lang="en-US"/>
           </a:p>
@@ -948,7 +948,7 @@
           <a:lstStyle/>
           <a:p>
             <a:r>
-              <a:rPr lang="en-US" smtClean="0"/>
+              <a:rPr lang="en-US"/>
               <a:t>Click to edit Master title style</a:t>
             </a:r>
             <a:endParaRPr lang="en-US" dirty="0"/>
@@ -972,35 +972,35 @@
           <a:p>
             <a:pPr lvl="0"/>
             <a:r>
-              <a:rPr lang="en-US" smtClean="0"/>
+              <a:rPr lang="en-US"/>
               <a:t>Click to edit Master text styles</a:t>
             </a:r>
           </a:p>
           <a:p>
             <a:pPr lvl="1"/>
             <a:r>
-              <a:rPr lang="en-US" smtClean="0"/>
+              <a:rPr lang="en-US"/>
               <a:t>Second level</a:t>
             </a:r>
           </a:p>
           <a:p>
             <a:pPr lvl="2"/>
             <a:r>
-              <a:rPr lang="en-US" smtClean="0"/>
+              <a:rPr lang="en-US"/>
               <a:t>Third level</a:t>
             </a:r>
           </a:p>
           <a:p>
             <a:pPr lvl="3"/>
             <a:r>
-              <a:rPr lang="en-US" smtClean="0"/>
+              <a:rPr lang="en-US"/>
               <a:t>Fourth level</a:t>
             </a:r>
           </a:p>
           <a:p>
             <a:pPr lvl="4"/>
             <a:r>
-              <a:rPr lang="en-US" smtClean="0"/>
+              <a:rPr lang="en-US"/>
               <a:t>Fifth level</a:t>
             </a:r>
             <a:endParaRPr lang="en-US" dirty="0"/>
@@ -1024,7 +1024,7 @@
           <a:p>
             <a:fld id="{D9EE7AAC-8CEC-485B-AC6B-CF6CD7099F42}" type="datetimeFigureOut">
               <a:rPr lang="en-US" smtClean="0"/>
-              <a:t>29-07-2024</a:t>
+              <a:t>12/2/2025</a:t>
             </a:fld>
             <a:endParaRPr lang="en-US"/>
           </a:p>
@@ -1118,7 +1118,7 @@
           <a:lstStyle/>
           <a:p>
             <a:r>
-              <a:rPr lang="en-US" smtClean="0"/>
+              <a:rPr lang="en-US"/>
               <a:t>Click to edit Master title style</a:t>
             </a:r>
             <a:endParaRPr lang="vi-VN"/>
@@ -1142,7 +1142,7 @@
           <a:p>
             <a:fld id="{D9EE7AAC-8CEC-485B-AC6B-CF6CD7099F42}" type="datetimeFigureOut">
               <a:rPr lang="en-US" smtClean="0"/>
-              <a:t>29-07-2024</a:t>
+              <a:t>12/2/2025</a:t>
             </a:fld>
             <a:endParaRPr lang="en-US"/>
           </a:p>
@@ -1212,35 +1212,35 @@
           <a:p>
             <a:pPr lvl="0"/>
             <a:r>
-              <a:rPr lang="en-US" dirty="0" smtClean="0"/>
+              <a:rPr lang="en-US" dirty="0"/>
               <a:t>Click to edit Master text styles</a:t>
             </a:r>
           </a:p>
           <a:p>
             <a:pPr lvl="1"/>
             <a:r>
-              <a:rPr lang="en-US" dirty="0" smtClean="0"/>
+              <a:rPr lang="en-US" dirty="0"/>
               <a:t>Second level</a:t>
             </a:r>
           </a:p>
           <a:p>
             <a:pPr lvl="2"/>
             <a:r>
-              <a:rPr lang="en-US" dirty="0" smtClean="0"/>
+              <a:rPr lang="en-US" dirty="0"/>
               <a:t>Third level</a:t>
             </a:r>
           </a:p>
           <a:p>
             <a:pPr lvl="3"/>
             <a:r>
-              <a:rPr lang="en-US" dirty="0" smtClean="0"/>
+              <a:rPr lang="en-US" dirty="0"/>
               <a:t>Fourth level</a:t>
             </a:r>
           </a:p>
           <a:p>
             <a:pPr lvl="4"/>
             <a:r>
-              <a:rPr lang="en-US" dirty="0" smtClean="0"/>
+              <a:rPr lang="en-US" dirty="0"/>
               <a:t>Fifth level</a:t>
             </a:r>
             <a:endParaRPr lang="vi-VN" dirty="0"/>
@@ -1302,7 +1302,7 @@
           </a:lstStyle>
           <a:p>
             <a:r>
-              <a:rPr lang="en-US" smtClean="0"/>
+              <a:rPr lang="en-US"/>
               <a:t>Click to edit Master title style</a:t>
             </a:r>
             <a:endParaRPr lang="en-US" dirty="0"/>
@@ -1422,7 +1422,7 @@
           <a:p>
             <a:pPr lvl="0"/>
             <a:r>
-              <a:rPr lang="en-US" smtClean="0"/>
+              <a:rPr lang="en-US"/>
               <a:t>Click to edit Master text styles</a:t>
             </a:r>
           </a:p>
@@ -1445,7 +1445,7 @@
           <a:p>
             <a:fld id="{D9EE7AAC-8CEC-485B-AC6B-CF6CD7099F42}" type="datetimeFigureOut">
               <a:rPr lang="en-US" smtClean="0"/>
-              <a:t>29-07-2024</a:t>
+              <a:t>12/2/2025</a:t>
             </a:fld>
             <a:endParaRPr lang="en-US"/>
           </a:p>
@@ -1539,7 +1539,7 @@
           <a:lstStyle/>
           <a:p>
             <a:r>
-              <a:rPr lang="en-US" smtClean="0"/>
+              <a:rPr lang="en-US"/>
               <a:t>Click to edit Master title style</a:t>
             </a:r>
             <a:endParaRPr lang="en-US" dirty="0"/>
@@ -1568,35 +1568,35 @@
           <a:p>
             <a:pPr lvl="0"/>
             <a:r>
-              <a:rPr lang="en-US" smtClean="0"/>
+              <a:rPr lang="en-US"/>
               <a:t>Click to edit Master text styles</a:t>
             </a:r>
           </a:p>
           <a:p>
             <a:pPr lvl="1"/>
             <a:r>
-              <a:rPr lang="en-US" smtClean="0"/>
+              <a:rPr lang="en-US"/>
               <a:t>Second level</a:t>
             </a:r>
           </a:p>
           <a:p>
             <a:pPr lvl="2"/>
             <a:r>
-              <a:rPr lang="en-US" smtClean="0"/>
+              <a:rPr lang="en-US"/>
               <a:t>Third level</a:t>
             </a:r>
           </a:p>
           <a:p>
             <a:pPr lvl="3"/>
             <a:r>
-              <a:rPr lang="en-US" smtClean="0"/>
+              <a:rPr lang="en-US"/>
               <a:t>Fourth level</a:t>
             </a:r>
           </a:p>
           <a:p>
             <a:pPr lvl="4"/>
             <a:r>
-              <a:rPr lang="en-US" smtClean="0"/>
+              <a:rPr lang="en-US"/>
               <a:t>Fifth level</a:t>
             </a:r>
             <a:endParaRPr lang="en-US" dirty="0"/>
@@ -1625,35 +1625,35 @@
           <a:p>
             <a:pPr lvl="0"/>
             <a:r>
-              <a:rPr lang="en-US" smtClean="0"/>
+              <a:rPr lang="en-US"/>
               <a:t>Click to edit Master text styles</a:t>
             </a:r>
           </a:p>
           <a:p>
             <a:pPr lvl="1"/>
             <a:r>
-              <a:rPr lang="en-US" smtClean="0"/>
+              <a:rPr lang="en-US"/>
               <a:t>Second level</a:t>
             </a:r>
           </a:p>
           <a:p>
             <a:pPr lvl="2"/>
             <a:r>
-              <a:rPr lang="en-US" smtClean="0"/>
+              <a:rPr lang="en-US"/>
               <a:t>Third level</a:t>
             </a:r>
           </a:p>
           <a:p>
             <a:pPr lvl="3"/>
             <a:r>
-              <a:rPr lang="en-US" smtClean="0"/>
+              <a:rPr lang="en-US"/>
               <a:t>Fourth level</a:t>
             </a:r>
           </a:p>
           <a:p>
             <a:pPr lvl="4"/>
             <a:r>
-              <a:rPr lang="en-US" smtClean="0"/>
+              <a:rPr lang="en-US"/>
               <a:t>Fifth level</a:t>
             </a:r>
             <a:endParaRPr lang="en-US" dirty="0"/>
@@ -1677,7 +1677,7 @@
           <a:p>
             <a:fld id="{D9EE7AAC-8CEC-485B-AC6B-CF6CD7099F42}" type="datetimeFigureOut">
               <a:rPr lang="en-US" smtClean="0"/>
-              <a:t>29-07-2024</a:t>
+              <a:t>12/2/2025</a:t>
             </a:fld>
             <a:endParaRPr lang="en-US"/>
           </a:p>
@@ -1776,7 +1776,7 @@
           <a:lstStyle/>
           <a:p>
             <a:r>
-              <a:rPr lang="en-US" smtClean="0"/>
+              <a:rPr lang="en-US"/>
               <a:t>Click to edit Master title style</a:t>
             </a:r>
             <a:endParaRPr lang="en-US" dirty="0"/>
@@ -1842,7 +1842,7 @@
           <a:p>
             <a:pPr lvl="0"/>
             <a:r>
-              <a:rPr lang="en-US" smtClean="0"/>
+              <a:rPr lang="en-US"/>
               <a:t>Click to edit Master text styles</a:t>
             </a:r>
           </a:p>
@@ -1870,35 +1870,35 @@
           <a:p>
             <a:pPr lvl="0"/>
             <a:r>
-              <a:rPr lang="en-US" smtClean="0"/>
+              <a:rPr lang="en-US"/>
               <a:t>Click to edit Master text styles</a:t>
             </a:r>
           </a:p>
           <a:p>
             <a:pPr lvl="1"/>
             <a:r>
-              <a:rPr lang="en-US" smtClean="0"/>
+              <a:rPr lang="en-US"/>
               <a:t>Second level</a:t>
             </a:r>
           </a:p>
           <a:p>
             <a:pPr lvl="2"/>
             <a:r>
-              <a:rPr lang="en-US" smtClean="0"/>
+              <a:rPr lang="en-US"/>
               <a:t>Third level</a:t>
             </a:r>
           </a:p>
           <a:p>
             <a:pPr lvl="3"/>
             <a:r>
-              <a:rPr lang="en-US" smtClean="0"/>
+              <a:rPr lang="en-US"/>
               <a:t>Fourth level</a:t>
             </a:r>
           </a:p>
           <a:p>
             <a:pPr lvl="4"/>
             <a:r>
-              <a:rPr lang="en-US" smtClean="0"/>
+              <a:rPr lang="en-US"/>
               <a:t>Fifth level</a:t>
             </a:r>
             <a:endParaRPr lang="en-US" dirty="0"/>
@@ -1964,7 +1964,7 @@
           <a:p>
             <a:pPr lvl="0"/>
             <a:r>
-              <a:rPr lang="en-US" smtClean="0"/>
+              <a:rPr lang="en-US"/>
               <a:t>Click to edit Master text styles</a:t>
             </a:r>
           </a:p>
@@ -1992,35 +1992,35 @@
           <a:p>
             <a:pPr lvl="0"/>
             <a:r>
-              <a:rPr lang="en-US" smtClean="0"/>
+              <a:rPr lang="en-US"/>
               <a:t>Click to edit Master text styles</a:t>
             </a:r>
           </a:p>
           <a:p>
             <a:pPr lvl="1"/>
             <a:r>
-              <a:rPr lang="en-US" smtClean="0"/>
+              <a:rPr lang="en-US"/>
               <a:t>Second level</a:t>
             </a:r>
           </a:p>
           <a:p>
             <a:pPr lvl="2"/>
             <a:r>
-              <a:rPr lang="en-US" smtClean="0"/>
+              <a:rPr lang="en-US"/>
               <a:t>Third level</a:t>
             </a:r>
           </a:p>
           <a:p>
             <a:pPr lvl="3"/>
             <a:r>
-              <a:rPr lang="en-US" smtClean="0"/>
+              <a:rPr lang="en-US"/>
               <a:t>Fourth level</a:t>
             </a:r>
           </a:p>
           <a:p>
             <a:pPr lvl="4"/>
             <a:r>
-              <a:rPr lang="en-US" smtClean="0"/>
+              <a:rPr lang="en-US"/>
               <a:t>Fifth level</a:t>
             </a:r>
             <a:endParaRPr lang="en-US" dirty="0"/>
@@ -2044,7 +2044,7 @@
           <a:p>
             <a:fld id="{D9EE7AAC-8CEC-485B-AC6B-CF6CD7099F42}" type="datetimeFigureOut">
               <a:rPr lang="en-US" smtClean="0"/>
-              <a:t>29-07-2024</a:t>
+              <a:t>12/2/2025</a:t>
             </a:fld>
             <a:endParaRPr lang="en-US"/>
           </a:p>
@@ -2138,7 +2138,7 @@
           <a:lstStyle/>
           <a:p>
             <a:r>
-              <a:rPr lang="en-US" smtClean="0"/>
+              <a:rPr lang="en-US"/>
               <a:t>Click to edit Master title style</a:t>
             </a:r>
             <a:endParaRPr lang="en-US" dirty="0"/>
@@ -2162,7 +2162,7 @@
           <a:p>
             <a:fld id="{D9EE7AAC-8CEC-485B-AC6B-CF6CD7099F42}" type="datetimeFigureOut">
               <a:rPr lang="en-US" smtClean="0"/>
-              <a:t>29-07-2024</a:t>
+              <a:t>12/2/2025</a:t>
             </a:fld>
             <a:endParaRPr lang="en-US"/>
           </a:p>
@@ -2257,7 +2257,7 @@
           <a:p>
             <a:fld id="{D9EE7AAC-8CEC-485B-AC6B-CF6CD7099F42}" type="datetimeFigureOut">
               <a:rPr lang="en-US" smtClean="0"/>
-              <a:t>29-07-2024</a:t>
+              <a:t>12/2/2025</a:t>
             </a:fld>
             <a:endParaRPr lang="en-US"/>
           </a:p>
@@ -2360,7 +2360,7 @@
           </a:lstStyle>
           <a:p>
             <a:r>
-              <a:rPr lang="en-US" smtClean="0"/>
+              <a:rPr lang="en-US"/>
               <a:t>Click to edit Master title style</a:t>
             </a:r>
             <a:endParaRPr lang="en-US" dirty="0"/>
@@ -2417,35 +2417,35 @@
           <a:p>
             <a:pPr lvl="0"/>
             <a:r>
-              <a:rPr lang="en-US" smtClean="0"/>
+              <a:rPr lang="en-US"/>
               <a:t>Click to edit Master text styles</a:t>
             </a:r>
           </a:p>
           <a:p>
             <a:pPr lvl="1"/>
             <a:r>
-              <a:rPr lang="en-US" smtClean="0"/>
+              <a:rPr lang="en-US"/>
               <a:t>Second level</a:t>
             </a:r>
           </a:p>
           <a:p>
             <a:pPr lvl="2"/>
             <a:r>
-              <a:rPr lang="en-US" smtClean="0"/>
+              <a:rPr lang="en-US"/>
               <a:t>Third level</a:t>
             </a:r>
           </a:p>
           <a:p>
             <a:pPr lvl="3"/>
             <a:r>
-              <a:rPr lang="en-US" smtClean="0"/>
+              <a:rPr lang="en-US"/>
               <a:t>Fourth level</a:t>
             </a:r>
           </a:p>
           <a:p>
             <a:pPr lvl="4"/>
             <a:r>
-              <a:rPr lang="en-US" smtClean="0"/>
+              <a:rPr lang="en-US"/>
               <a:t>Fifth level</a:t>
             </a:r>
             <a:endParaRPr lang="en-US" dirty="0"/>
@@ -2511,7 +2511,7 @@
           <a:p>
             <a:pPr lvl="0"/>
             <a:r>
-              <a:rPr lang="en-US" smtClean="0"/>
+              <a:rPr lang="en-US"/>
               <a:t>Click to edit Master text styles</a:t>
             </a:r>
           </a:p>
@@ -2534,7 +2534,7 @@
           <a:p>
             <a:fld id="{D9EE7AAC-8CEC-485B-AC6B-CF6CD7099F42}" type="datetimeFigureOut">
               <a:rPr lang="en-US" smtClean="0"/>
-              <a:t>29-07-2024</a:t>
+              <a:t>12/2/2025</a:t>
             </a:fld>
             <a:endParaRPr lang="en-US"/>
           </a:p>
@@ -2643,7 +2643,7 @@
           <a:lstStyle/>
           <a:p>
             <a:r>
-              <a:rPr lang="en-US" smtClean="0"/>
+              <a:rPr lang="en-US"/>
               <a:t>Click to edit Master title style</a:t>
             </a:r>
             <a:endParaRPr lang="en-US" dirty="0"/>
@@ -2677,35 +2677,35 @@
           <a:p>
             <a:pPr lvl="0"/>
             <a:r>
-              <a:rPr lang="en-US" smtClean="0"/>
+              <a:rPr lang="en-US"/>
               <a:t>Click to edit Master text styles</a:t>
             </a:r>
           </a:p>
           <a:p>
             <a:pPr lvl="1"/>
             <a:r>
-              <a:rPr lang="en-US" smtClean="0"/>
+              <a:rPr lang="en-US"/>
               <a:t>Second level</a:t>
             </a:r>
           </a:p>
           <a:p>
             <a:pPr lvl="2"/>
             <a:r>
-              <a:rPr lang="en-US" smtClean="0"/>
+              <a:rPr lang="en-US"/>
               <a:t>Third level</a:t>
             </a:r>
           </a:p>
           <a:p>
             <a:pPr lvl="3"/>
             <a:r>
-              <a:rPr lang="en-US" smtClean="0"/>
+              <a:rPr lang="en-US"/>
               <a:t>Fourth level</a:t>
             </a:r>
           </a:p>
           <a:p>
             <a:pPr lvl="4"/>
             <a:r>
-              <a:rPr lang="en-US" smtClean="0"/>
+              <a:rPr lang="en-US"/>
               <a:t>Fifth level</a:t>
             </a:r>
             <a:endParaRPr lang="en-US" dirty="0"/>
@@ -2747,7 +2747,7 @@
           <a:p>
             <a:fld id="{D9EE7AAC-8CEC-485B-AC6B-CF6CD7099F42}" type="datetimeFigureOut">
               <a:rPr lang="en-US" smtClean="0"/>
-              <a:t>29-07-2024</a:t>
+              <a:t>12/2/2025</a:t>
             </a:fld>
             <a:endParaRPr lang="en-US"/>
           </a:p>
@@ -3207,11 +3207,7 @@
           <a:p>
             <a:r>
               <a:rPr lang="en-US" b="1" dirty="0"/>
-              <a:t>Apple </a:t>
-            </a:r>
-            <a:r>
-              <a:rPr lang="en-US" b="1" dirty="0" smtClean="0"/>
-              <a:t>Crumble</a:t>
+              <a:t>Apple Crumble</a:t>
             </a:r>
             <a:endParaRPr lang="vi-VN" dirty="0"/>
           </a:p>
@@ -3252,7 +3248,7 @@
           <p:cNvPr id="2" name="Title 1">
             <a:extLst>
               <a:ext uri="{FF2B5EF4-FFF2-40B4-BE49-F238E27FC236}">
-                <a16:creationId xmlns:a16="http://schemas.microsoft.com/office/drawing/2014/main" xmlns="" id="{1DDFD113-9679-3CCD-4351-47BB405778D8}"/>
+                <a16:creationId xmlns:a16="http://schemas.microsoft.com/office/drawing/2014/main" id="{1DDFD113-9679-3CCD-4351-47BB405778D8}"/>
               </a:ext>
             </a:extLst>
           </p:cNvPr>
@@ -3268,35 +3264,125 @@
           <a:bodyPr/>
           <a:lstStyle/>
           <a:p>
-            <a:endParaRPr lang="en-US"/>
-          </a:p>
-        </p:txBody>
-      </p:sp>
-      <p:sp>
-        <p:nvSpPr>
-          <p:cNvPr id="3" name="Content Placeholder 2">
+            <a:pPr algn="ctr"/>
+            <a:r>
+              <a:rPr lang="en-US" b="1" dirty="0">
+                <a:solidFill>
+                  <a:srgbClr val="FF0000"/>
+                </a:solidFill>
+              </a:rPr>
+              <a:t>Apple Crumble</a:t>
+            </a:r>
+          </a:p>
+        </p:txBody>
+      </p:sp>
+      <p:pic>
+        <p:nvPicPr>
+          <p:cNvPr id="5" name="Content Placeholder 4">
             <a:extLst>
               <a:ext uri="{FF2B5EF4-FFF2-40B4-BE49-F238E27FC236}">
-                <a16:creationId xmlns:a16="http://schemas.microsoft.com/office/drawing/2014/main" xmlns="" id="{63B4C2D1-B002-401C-FA11-D11C96E2E5D7}"/>
+                <a16:creationId xmlns:a16="http://schemas.microsoft.com/office/drawing/2014/main" id="{E2FE7E3E-B708-FE67-FCFE-3EF2748C604E}"/>
               </a:ext>
             </a:extLst>
           </p:cNvPr>
-          <p:cNvSpPr>
-            <a:spLocks noGrp="1"/>
-          </p:cNvSpPr>
+          <p:cNvPicPr>
+            <a:picLocks noGrp="1" noChangeAspect="1"/>
+          </p:cNvPicPr>
           <p:nvPr>
             <p:ph idx="1"/>
           </p:nvPr>
-        </p:nvSpPr>
-        <p:spPr/>
-        <p:txBody>
-          <a:bodyPr/>
-          <a:lstStyle/>
-          <a:p>
-            <a:endParaRPr lang="en-US"/>
-          </a:p>
-        </p:txBody>
-      </p:sp>
+        </p:nvPicPr>
+        <p:blipFill>
+          <a:blip r:embed="rId2">
+            <a:extLst>
+              <a:ext uri="{28A0092B-C50C-407E-A947-70E740481C1C}">
+                <a14:useLocalDpi xmlns:a14="http://schemas.microsoft.com/office/drawing/2010/main" val="0"/>
+              </a:ext>
+            </a:extLst>
+          </a:blip>
+          <a:stretch>
+            <a:fillRect/>
+          </a:stretch>
+        </p:blipFill>
+        <p:spPr>
+          <a:xfrm>
+            <a:off x="855008" y="1754320"/>
+            <a:ext cx="3209345" cy="4351338"/>
+          </a:xfrm>
+        </p:spPr>
+      </p:pic>
+      <p:pic>
+        <p:nvPicPr>
+          <p:cNvPr id="7" name="Picture 6">
+            <a:extLst>
+              <a:ext uri="{FF2B5EF4-FFF2-40B4-BE49-F238E27FC236}">
+                <a16:creationId xmlns:a16="http://schemas.microsoft.com/office/drawing/2014/main" id="{102769E1-6D5C-9175-4045-4933C5A67DA9}"/>
+              </a:ext>
+            </a:extLst>
+          </p:cNvPr>
+          <p:cNvPicPr>
+            <a:picLocks noChangeAspect="1"/>
+          </p:cNvPicPr>
+          <p:nvPr/>
+        </p:nvPicPr>
+        <p:blipFill>
+          <a:blip r:embed="rId3">
+            <a:extLst>
+              <a:ext uri="{28A0092B-C50C-407E-A947-70E740481C1C}">
+                <a14:useLocalDpi xmlns:a14="http://schemas.microsoft.com/office/drawing/2010/main" val="0"/>
+              </a:ext>
+            </a:extLst>
+          </a:blip>
+          <a:stretch>
+            <a:fillRect/>
+          </a:stretch>
+        </p:blipFill>
+        <p:spPr>
+          <a:xfrm>
+            <a:off x="4683437" y="1754320"/>
+            <a:ext cx="3291640" cy="4388853"/>
+          </a:xfrm>
+          <a:prstGeom prst="rect">
+            <a:avLst/>
+          </a:prstGeom>
+        </p:spPr>
+      </p:pic>
+      <p:pic>
+        <p:nvPicPr>
+          <p:cNvPr id="9" name="Picture 8">
+            <a:extLst>
+              <a:ext uri="{FF2B5EF4-FFF2-40B4-BE49-F238E27FC236}">
+                <a16:creationId xmlns:a16="http://schemas.microsoft.com/office/drawing/2014/main" id="{67692528-8E90-A542-C221-8C89EFF59728}"/>
+              </a:ext>
+            </a:extLst>
+          </p:cNvPr>
+          <p:cNvPicPr>
+            <a:picLocks noChangeAspect="1"/>
+          </p:cNvPicPr>
+          <p:nvPr/>
+        </p:nvPicPr>
+        <p:blipFill>
+          <a:blip r:embed="rId4">
+            <a:extLst>
+              <a:ext uri="{28A0092B-C50C-407E-A947-70E740481C1C}">
+                <a14:useLocalDpi xmlns:a14="http://schemas.microsoft.com/office/drawing/2010/main" val="0"/>
+              </a:ext>
+            </a:extLst>
+          </a:blip>
+          <a:stretch>
+            <a:fillRect/>
+          </a:stretch>
+        </p:blipFill>
+        <p:spPr>
+          <a:xfrm>
+            <a:off x="8608964" y="1690689"/>
+            <a:ext cx="2972503" cy="4452484"/>
+          </a:xfrm>
+          <a:prstGeom prst="rect">
+            <a:avLst/>
+          </a:prstGeom>
+        </p:spPr>
+      </p:pic>
     </p:spTree>
     <p:extLst>
       <p:ext uri="{BB962C8B-B14F-4D97-AF65-F5344CB8AC3E}">
@@ -3332,7 +3418,7 @@
           <p:cNvPr id="2" name="Title 1">
             <a:extLst>
               <a:ext uri="{FF2B5EF4-FFF2-40B4-BE49-F238E27FC236}">
-                <a16:creationId xmlns:a16="http://schemas.microsoft.com/office/drawing/2014/main" xmlns="" id="{874B4255-63DA-A6F6-A23F-B019139CA070}"/>
+                <a16:creationId xmlns:a16="http://schemas.microsoft.com/office/drawing/2014/main" id="{874B4255-63DA-A6F6-A23F-B019139CA070}"/>
               </a:ext>
             </a:extLst>
           </p:cNvPr>
@@ -3352,31 +3438,77 @@
           </a:p>
         </p:txBody>
       </p:sp>
-      <p:sp>
-        <p:nvSpPr>
-          <p:cNvPr id="3" name="Content Placeholder 2">
+      <p:pic>
+        <p:nvPicPr>
+          <p:cNvPr id="5" name="Content Placeholder 4">
             <a:extLst>
               <a:ext uri="{FF2B5EF4-FFF2-40B4-BE49-F238E27FC236}">
-                <a16:creationId xmlns:a16="http://schemas.microsoft.com/office/drawing/2014/main" xmlns="" id="{78251BAD-D0B3-D3FE-B8F5-8081C4016D7A}"/>
+                <a16:creationId xmlns:a16="http://schemas.microsoft.com/office/drawing/2014/main" id="{4D40B273-5F81-1E7A-4165-7324D379E2B8}"/>
               </a:ext>
             </a:extLst>
           </p:cNvPr>
-          <p:cNvSpPr>
-            <a:spLocks noGrp="1"/>
-          </p:cNvSpPr>
+          <p:cNvPicPr>
+            <a:picLocks noGrp="1" noChangeAspect="1"/>
+          </p:cNvPicPr>
           <p:nvPr>
             <p:ph idx="1"/>
           </p:nvPr>
-        </p:nvSpPr>
-        <p:spPr/>
-        <p:txBody>
-          <a:bodyPr/>
-          <a:lstStyle/>
-          <a:p>
-            <a:endParaRPr lang="en-US"/>
-          </a:p>
-        </p:txBody>
-      </p:sp>
+        </p:nvPicPr>
+        <p:blipFill>
+          <a:blip r:embed="rId2">
+            <a:extLst>
+              <a:ext uri="{28A0092B-C50C-407E-A947-70E740481C1C}">
+                <a14:useLocalDpi xmlns:a14="http://schemas.microsoft.com/office/drawing/2010/main" val="0"/>
+              </a:ext>
+            </a:extLst>
+          </a:blip>
+          <a:stretch>
+            <a:fillRect/>
+          </a:stretch>
+        </p:blipFill>
+        <p:spPr>
+          <a:xfrm>
+            <a:off x="1047750" y="0"/>
+            <a:ext cx="4578438" cy="6858000"/>
+          </a:xfrm>
+        </p:spPr>
+      </p:pic>
+      <p:pic>
+        <p:nvPicPr>
+          <p:cNvPr id="7" name="Picture 6">
+            <a:extLst>
+              <a:ext uri="{FF2B5EF4-FFF2-40B4-BE49-F238E27FC236}">
+                <a16:creationId xmlns:a16="http://schemas.microsoft.com/office/drawing/2014/main" id="{69DA6BD1-5390-0196-678F-3389CACDDA15}"/>
+              </a:ext>
+            </a:extLst>
+          </p:cNvPr>
+          <p:cNvPicPr>
+            <a:picLocks noChangeAspect="1"/>
+          </p:cNvPicPr>
+          <p:nvPr/>
+        </p:nvPicPr>
+        <p:blipFill>
+          <a:blip r:embed="rId3">
+            <a:extLst>
+              <a:ext uri="{28A0092B-C50C-407E-A947-70E740481C1C}">
+                <a14:useLocalDpi xmlns:a14="http://schemas.microsoft.com/office/drawing/2010/main" val="0"/>
+              </a:ext>
+            </a:extLst>
+          </a:blip>
+          <a:stretch>
+            <a:fillRect/>
+          </a:stretch>
+        </p:blipFill>
+        <p:spPr>
+          <a:xfrm>
+            <a:off x="6742112" y="0"/>
+            <a:ext cx="4572000" cy="6858000"/>
+          </a:xfrm>
+          <a:prstGeom prst="rect">
+            <a:avLst/>
+          </a:prstGeom>
+        </p:spPr>
+      </p:pic>
     </p:spTree>
     <p:extLst>
       <p:ext uri="{BB962C8B-B14F-4D97-AF65-F5344CB8AC3E}">
@@ -3412,7 +3544,7 @@
           <p:cNvPr id="15" name="Title 12">
             <a:extLst>
               <a:ext uri="{FF2B5EF4-FFF2-40B4-BE49-F238E27FC236}">
-                <a16:creationId xmlns:a16="http://schemas.microsoft.com/office/drawing/2014/main" xmlns="" id="{910DA710-DE32-7422-5F7E-F2EF36256F6C}"/>
+                <a16:creationId xmlns:a16="http://schemas.microsoft.com/office/drawing/2014/main" id="{910DA710-DE32-7422-5F7E-F2EF36256F6C}"/>
               </a:ext>
             </a:extLst>
           </p:cNvPr>
@@ -3463,7 +3595,7 @@
           <p:cNvPr id="16" name="Rectangle 15">
             <a:extLst>
               <a:ext uri="{FF2B5EF4-FFF2-40B4-BE49-F238E27FC236}">
-                <a16:creationId xmlns:a16="http://schemas.microsoft.com/office/drawing/2014/main" xmlns="" id="{1AF0E6C8-E5BE-26CC-DB2F-5420604DBF88}"/>
+                <a16:creationId xmlns:a16="http://schemas.microsoft.com/office/drawing/2014/main" id="{1AF0E6C8-E5BE-26CC-DB2F-5420604DBF88}"/>
               </a:ext>
             </a:extLst>
           </p:cNvPr>
@@ -3528,7 +3660,7 @@
           <p:cNvPr id="17" name="Rectangle 16">
             <a:extLst>
               <a:ext uri="{FF2B5EF4-FFF2-40B4-BE49-F238E27FC236}">
-                <a16:creationId xmlns:a16="http://schemas.microsoft.com/office/drawing/2014/main" xmlns="" id="{F4FD8A97-66CF-09CB-6A72-5C5EC6B4D016}"/>
+                <a16:creationId xmlns:a16="http://schemas.microsoft.com/office/drawing/2014/main" id="{F4FD8A97-66CF-09CB-6A72-5C5EC6B4D016}"/>
               </a:ext>
             </a:extLst>
           </p:cNvPr>
@@ -3907,15 +4039,7 @@
             </a:pPr>
             <a:r>
               <a:rPr lang="en-US" sz="2100" kern="1200" dirty="0"/>
-              <a:t>Peel, core, and chop the apples. Put apples into a pan with 4 </a:t>
-            </a:r>
-            <a:r>
-              <a:rPr lang="en-US" sz="2100" kern="1200" dirty="0" smtClean="0"/>
-              <a:t>tablespoons </a:t>
-            </a:r>
-            <a:r>
-              <a:rPr lang="en-US" sz="2100" kern="1200" dirty="0"/>
-              <a:t>of sugar and </a:t>
+              <a:t>Peel, core, and chop the apples. Put apples into a pan with 4 tablespoons of sugar and </a:t>
             </a:r>
             <a:r>
               <a:rPr lang="en-US" sz="2100" b="0" i="0" kern="1200" dirty="0"/>
@@ -4421,7 +4545,7 @@
           <p:cNvPr id="4" name="Rectangle 3">
             <a:extLst>
               <a:ext uri="{FF2B5EF4-FFF2-40B4-BE49-F238E27FC236}">
-                <a16:creationId xmlns:a16="http://schemas.microsoft.com/office/drawing/2014/main" xmlns="" id="{83495B23-CBC0-76B5-1C9D-AC0A8118C720}"/>
+                <a16:creationId xmlns:a16="http://schemas.microsoft.com/office/drawing/2014/main" id="{83495B23-CBC0-76B5-1C9D-AC0A8118C720}"/>
               </a:ext>
             </a:extLst>
           </p:cNvPr>
@@ -4486,7 +4610,7 @@
           <p:cNvPr id="6" name="Rectangle 5">
             <a:extLst>
               <a:ext uri="{FF2B5EF4-FFF2-40B4-BE49-F238E27FC236}">
-                <a16:creationId xmlns:a16="http://schemas.microsoft.com/office/drawing/2014/main" xmlns="" id="{D4237ACF-8EA7-5829-6890-3494996AA4FA}"/>
+                <a16:creationId xmlns:a16="http://schemas.microsoft.com/office/drawing/2014/main" id="{D4237ACF-8EA7-5829-6890-3494996AA4FA}"/>
               </a:ext>
             </a:extLst>
           </p:cNvPr>
